--- a/docs/wswCR7/软工实践-10-23.pptx
+++ b/docs/wswCR7/软工实践-10-23.pptx
@@ -6,10 +6,10 @@
   </p:sldMasterIdLst>
   <p:sldIdLst>
     <p:sldId id="263" r:id="rId3"/>
-    <p:sldId id="261" r:id="rId4"/>
-    <p:sldId id="262" r:id="rId5"/>
-    <p:sldId id="256" r:id="rId6"/>
-    <p:sldId id="257" r:id="rId7"/>
+    <p:sldId id="256" r:id="rId4"/>
+    <p:sldId id="266" r:id="rId5"/>
+    <p:sldId id="257" r:id="rId6"/>
+    <p:sldId id="265" r:id="rId7"/>
     <p:sldId id="258" r:id="rId8"/>
   </p:sldIdLst>
   <p:sldSz cx="12192000" cy="6858000"/>
@@ -3085,8 +3085,8 @@
         </p:nvSpPr>
         <p:spPr>
           <a:xfrm>
-            <a:off x="3420745" y="3045460"/>
-            <a:ext cx="7204710" cy="829945"/>
+            <a:off x="3371215" y="2217420"/>
+            <a:ext cx="7204710" cy="1198880"/>
           </a:xfrm>
           <a:prstGeom prst="rect">
             <a:avLst/>
@@ -3127,7 +3127,26 @@
             </a:r>
             <a:r>
               <a:rPr lang="zh-CN" altLang="en-US" sz="2400"/>
-              <a:t>进行连接测试</a:t>
+              <a:t>进行连接</a:t>
+            </a:r>
+            <a:r>
+              <a:rPr lang="zh-CN" altLang="en-US" sz="2400"/>
+              <a:t>并测试</a:t>
+            </a:r>
+            <a:endParaRPr lang="zh-CN" altLang="en-US" sz="2400"/>
+          </a:p>
+          <a:p>
+            <a:r>
+              <a:rPr lang="zh-CN" altLang="en-US" sz="2400"/>
+              <a:t>编写</a:t>
+            </a:r>
+            <a:r>
+              <a:rPr lang="en-US" altLang="zh-CN" sz="2400"/>
+              <a:t>agent</a:t>
+            </a:r>
+            <a:r>
+              <a:rPr lang="zh-CN" altLang="en-US" sz="2400"/>
+              <a:t>基本代码</a:t>
             </a:r>
             <a:endParaRPr lang="zh-CN" altLang="en-US" sz="2400"/>
           </a:p>
@@ -3141,7 +3160,7 @@
         </p:nvSpPr>
         <p:spPr>
           <a:xfrm>
-            <a:off x="4345305" y="2171065"/>
+            <a:off x="4345305" y="1462405"/>
             <a:ext cx="4064000" cy="583565"/>
           </a:xfrm>
           <a:prstGeom prst="rect">
@@ -3170,8 +3189,8 @@
         </p:nvSpPr>
         <p:spPr>
           <a:xfrm>
-            <a:off x="1419225" y="4039870"/>
-            <a:ext cx="9696450" cy="829945"/>
+            <a:off x="3456940" y="3587750"/>
+            <a:ext cx="4723765" cy="2676525"/>
           </a:xfrm>
           <a:prstGeom prst="rect">
             <a:avLst/>
@@ -3199,6 +3218,13 @@
               </a:rPr>
               <a:t>:</a:t>
             </a:r>
+            <a:endParaRPr lang="en-US" altLang="zh-CN" sz="2400">
+              <a:latin typeface="微软雅黑" panose="020B0503020204020204" charset="-122"/>
+              <a:ea typeface="微软雅黑" panose="020B0503020204020204" charset="-122"/>
+              <a:cs typeface="微软雅黑" panose="020B0503020204020204" charset="-122"/>
+            </a:endParaRPr>
+          </a:p>
+          <a:p>
             <a:r>
               <a:rPr lang="en-US" altLang="zh-CN" sz="2400">
                 <a:latin typeface="微软雅黑" panose="020B0503020204020204" charset="-122"/>
@@ -3206,7 +3232,93 @@
                 <a:cs typeface="微软雅黑" panose="020B0503020204020204" charset="-122"/>
                 <a:sym typeface="+mn-ea"/>
               </a:rPr>
-              <a:t>rag_agent.yaml,qwen_flash.yaml,test_qwen_connection.py</a:t>
+              <a:t>1.rag_agent.yaml</a:t>
+            </a:r>
+            <a:endParaRPr lang="en-US" altLang="zh-CN" sz="2400">
+              <a:latin typeface="微软雅黑" panose="020B0503020204020204" charset="-122"/>
+              <a:ea typeface="微软雅黑" panose="020B0503020204020204" charset="-122"/>
+              <a:cs typeface="微软雅黑" panose="020B0503020204020204" charset="-122"/>
+              <a:sym typeface="+mn-ea"/>
+            </a:endParaRPr>
+          </a:p>
+          <a:p>
+            <a:r>
+              <a:rPr lang="en-US" altLang="zh-CN" sz="2400">
+                <a:latin typeface="微软雅黑" panose="020B0503020204020204" charset="-122"/>
+                <a:ea typeface="微软雅黑" panose="020B0503020204020204" charset="-122"/>
+                <a:cs typeface="微软雅黑" panose="020B0503020204020204" charset="-122"/>
+                <a:sym typeface="+mn-ea"/>
+              </a:rPr>
+              <a:t>2.</a:t>
+            </a:r>
+            <a:r>
+              <a:rPr lang="en-US" altLang="zh-CN" sz="2400">
+                <a:latin typeface="微软雅黑" panose="020B0503020204020204" charset="-122"/>
+                <a:ea typeface="微软雅黑" panose="020B0503020204020204" charset="-122"/>
+                <a:cs typeface="Times New Roman" panose="02020603050405020304" charset="0"/>
+                <a:sym typeface="+mn-ea"/>
+              </a:rPr>
+              <a:t>rag_agent_template.py</a:t>
+            </a:r>
+            <a:endParaRPr lang="en-US" altLang="zh-CN" sz="2400">
+              <a:latin typeface="微软雅黑" panose="020B0503020204020204" charset="-122"/>
+              <a:ea typeface="微软雅黑" panose="020B0503020204020204" charset="-122"/>
+              <a:cs typeface="微软雅黑" panose="020B0503020204020204" charset="-122"/>
+              <a:sym typeface="+mn-ea"/>
+            </a:endParaRPr>
+          </a:p>
+          <a:p>
+            <a:r>
+              <a:rPr lang="en-US" altLang="zh-CN" sz="2400">
+                <a:latin typeface="微软雅黑" panose="020B0503020204020204" charset="-122"/>
+                <a:ea typeface="微软雅黑" panose="020B0503020204020204" charset="-122"/>
+                <a:cs typeface="微软雅黑" panose="020B0503020204020204" charset="-122"/>
+                <a:sym typeface="+mn-ea"/>
+              </a:rPr>
+              <a:t>3.qwen_flash.yaml</a:t>
+            </a:r>
+            <a:endParaRPr lang="en-US" altLang="zh-CN" sz="2400">
+              <a:latin typeface="微软雅黑" panose="020B0503020204020204" charset="-122"/>
+              <a:ea typeface="微软雅黑" panose="020B0503020204020204" charset="-122"/>
+              <a:cs typeface="微软雅黑" panose="020B0503020204020204" charset="-122"/>
+              <a:sym typeface="+mn-ea"/>
+            </a:endParaRPr>
+          </a:p>
+          <a:p>
+            <a:r>
+              <a:rPr lang="en-US" altLang="zh-CN" sz="2400">
+                <a:latin typeface="微软雅黑" panose="020B0503020204020204" charset="-122"/>
+                <a:ea typeface="微软雅黑" panose="020B0503020204020204" charset="-122"/>
+                <a:cs typeface="微软雅黑" panose="020B0503020204020204" charset="-122"/>
+                <a:sym typeface="+mn-ea"/>
+              </a:rPr>
+              <a:t>4.test_qwen_connection.py</a:t>
+            </a:r>
+            <a:endParaRPr lang="en-US" altLang="zh-CN" sz="2400">
+              <a:latin typeface="微软雅黑" panose="020B0503020204020204" charset="-122"/>
+              <a:ea typeface="微软雅黑" panose="020B0503020204020204" charset="-122"/>
+              <a:cs typeface="微软雅黑" panose="020B0503020204020204" charset="-122"/>
+              <a:sym typeface="+mn-ea"/>
+            </a:endParaRPr>
+          </a:p>
+          <a:p>
+            <a:r>
+              <a:rPr lang="en-US" altLang="zh-CN" sz="2400">
+                <a:latin typeface="微软雅黑" panose="020B0503020204020204" charset="-122"/>
+                <a:ea typeface="微软雅黑" panose="020B0503020204020204" charset="-122"/>
+                <a:cs typeface="微软雅黑" panose="020B0503020204020204" charset="-122"/>
+                <a:sym typeface="+mn-ea"/>
+              </a:rPr>
+              <a:t>5.qwen_openai_style_llm.</a:t>
+            </a:r>
+            <a:r>
+              <a:rPr lang="en-US" altLang="zh-CN" sz="2400">
+                <a:latin typeface="微软雅黑" panose="020B0503020204020204" charset="-122"/>
+                <a:ea typeface="微软雅黑" panose="020B0503020204020204" charset="-122"/>
+                <a:cs typeface="微软雅黑" panose="020B0503020204020204" charset="-122"/>
+                <a:sym typeface="+mn-ea"/>
+              </a:rPr>
+              <a:t>py</a:t>
             </a:r>
             <a:endParaRPr lang="en-US" altLang="zh-CN" sz="2400">
               <a:latin typeface="微软雅黑" panose="020B0503020204020204" charset="-122"/>
@@ -3259,240 +3371,6 @@
 </file>
 
 <file path=ppt/slides/slide2.xml><?xml version="1.0" encoding="utf-8"?>
-<p:sld xmlns:a="http://schemas.openxmlformats.org/drawingml/2006/main" xmlns:r="http://schemas.openxmlformats.org/officeDocument/2006/relationships" xmlns:p="http://schemas.openxmlformats.org/presentationml/2006/main">
-  <p:cSld>
-    <p:spTree>
-      <p:nvGrpSpPr>
-        <p:cNvPr id="1" name=""/>
-        <p:cNvGrpSpPr/>
-        <p:nvPr/>
-      </p:nvGrpSpPr>
-      <p:grpSpPr/>
-      <p:pic>
-        <p:nvPicPr>
-          <p:cNvPr id="6" name="图片 5"/>
-          <p:cNvPicPr>
-            <a:picLocks noChangeAspect="1"/>
-          </p:cNvPicPr>
-          <p:nvPr/>
-        </p:nvPicPr>
-        <p:blipFill>
-          <a:blip r:embed="rId1"/>
-          <a:stretch>
-            <a:fillRect/>
-          </a:stretch>
-        </p:blipFill>
-        <p:spPr>
-          <a:xfrm>
-            <a:off x="107315" y="53975"/>
-            <a:ext cx="6182360" cy="335280"/>
-          </a:xfrm>
-          <a:prstGeom prst="rect">
-            <a:avLst/>
-          </a:prstGeom>
-        </p:spPr>
-      </p:pic>
-      <p:pic>
-        <p:nvPicPr>
-          <p:cNvPr id="7" name="图片 6"/>
-          <p:cNvPicPr>
-            <a:picLocks noChangeAspect="1"/>
-          </p:cNvPicPr>
-          <p:nvPr/>
-        </p:nvPicPr>
-        <p:blipFill>
-          <a:blip r:embed="rId2"/>
-          <a:stretch>
-            <a:fillRect/>
-          </a:stretch>
-        </p:blipFill>
-        <p:spPr>
-          <a:xfrm>
-            <a:off x="107315" y="532765"/>
-            <a:ext cx="7445375" cy="234315"/>
-          </a:xfrm>
-          <a:prstGeom prst="rect">
-            <a:avLst/>
-          </a:prstGeom>
-        </p:spPr>
-      </p:pic>
-      <p:pic>
-        <p:nvPicPr>
-          <p:cNvPr id="8" name="图片 7"/>
-          <p:cNvPicPr>
-            <a:picLocks noChangeAspect="1"/>
-          </p:cNvPicPr>
-          <p:nvPr/>
-        </p:nvPicPr>
-        <p:blipFill>
-          <a:blip r:embed="rId3"/>
-          <a:stretch>
-            <a:fillRect/>
-          </a:stretch>
-        </p:blipFill>
-        <p:spPr>
-          <a:xfrm>
-            <a:off x="58420" y="1019810"/>
-            <a:ext cx="12192000" cy="499110"/>
-          </a:xfrm>
-          <a:prstGeom prst="rect">
-            <a:avLst/>
-          </a:prstGeom>
-        </p:spPr>
-      </p:pic>
-      <p:pic>
-        <p:nvPicPr>
-          <p:cNvPr id="9" name="图片 8"/>
-          <p:cNvPicPr>
-            <a:picLocks noChangeAspect="1"/>
-          </p:cNvPicPr>
-          <p:nvPr/>
-        </p:nvPicPr>
-        <p:blipFill>
-          <a:blip r:embed="rId4"/>
-          <a:stretch>
-            <a:fillRect/>
-          </a:stretch>
-        </p:blipFill>
-        <p:spPr>
-          <a:xfrm>
-            <a:off x="107315" y="1685290"/>
-            <a:ext cx="8643620" cy="255905"/>
-          </a:xfrm>
-          <a:prstGeom prst="rect">
-            <a:avLst/>
-          </a:prstGeom>
-        </p:spPr>
-      </p:pic>
-      <p:pic>
-        <p:nvPicPr>
-          <p:cNvPr id="10" name="图片 9"/>
-          <p:cNvPicPr>
-            <a:picLocks noChangeAspect="1"/>
-          </p:cNvPicPr>
-          <p:nvPr/>
-        </p:nvPicPr>
-        <p:blipFill>
-          <a:blip r:embed="rId5"/>
-          <a:stretch>
-            <a:fillRect/>
-          </a:stretch>
-        </p:blipFill>
-        <p:spPr>
-          <a:xfrm>
-            <a:off x="107315" y="2233295"/>
-            <a:ext cx="8322945" cy="318770"/>
-          </a:xfrm>
-          <a:prstGeom prst="rect">
-            <a:avLst/>
-          </a:prstGeom>
-        </p:spPr>
-      </p:pic>
-      <p:pic>
-        <p:nvPicPr>
-          <p:cNvPr id="11" name="图片 10"/>
-          <p:cNvPicPr>
-            <a:picLocks noChangeAspect="1"/>
-          </p:cNvPicPr>
-          <p:nvPr/>
-        </p:nvPicPr>
-        <p:blipFill>
-          <a:blip r:embed="rId6"/>
-          <a:stretch>
-            <a:fillRect/>
-          </a:stretch>
-        </p:blipFill>
-        <p:spPr>
-          <a:xfrm>
-            <a:off x="58420" y="2922270"/>
-            <a:ext cx="12192000" cy="3771900"/>
-          </a:xfrm>
-          <a:prstGeom prst="rect">
-            <a:avLst/>
-          </a:prstGeom>
-        </p:spPr>
-      </p:pic>
-    </p:spTree>
-    <p:custDataLst>
-      <p:tags r:id="rId7"/>
-    </p:custDataLst>
-  </p:cSld>
-  <p:clrMapOvr>
-    <a:masterClrMapping/>
-  </p:clrMapOvr>
-</p:sld>
-</file>
-
-<file path=ppt/slides/slide3.xml><?xml version="1.0" encoding="utf-8"?>
-<p:sld xmlns:a="http://schemas.openxmlformats.org/drawingml/2006/main" xmlns:r="http://schemas.openxmlformats.org/officeDocument/2006/relationships" xmlns:p="http://schemas.openxmlformats.org/presentationml/2006/main">
-  <p:cSld>
-    <p:spTree>
-      <p:nvGrpSpPr>
-        <p:cNvPr id="1" name=""/>
-        <p:cNvGrpSpPr/>
-        <p:nvPr/>
-      </p:nvGrpSpPr>
-      <p:grpSpPr/>
-      <p:pic>
-        <p:nvPicPr>
-          <p:cNvPr id="4" name="图片 3"/>
-          <p:cNvPicPr>
-            <a:picLocks noChangeAspect="1"/>
-          </p:cNvPicPr>
-          <p:nvPr/>
-        </p:nvPicPr>
-        <p:blipFill>
-          <a:blip r:embed="rId1"/>
-          <a:stretch>
-            <a:fillRect/>
-          </a:stretch>
-        </p:blipFill>
-        <p:spPr>
-          <a:xfrm>
-            <a:off x="0" y="0"/>
-            <a:ext cx="12192000" cy="1628775"/>
-          </a:xfrm>
-          <a:prstGeom prst="rect">
-            <a:avLst/>
-          </a:prstGeom>
-        </p:spPr>
-      </p:pic>
-      <p:pic>
-        <p:nvPicPr>
-          <p:cNvPr id="5" name="图片 4"/>
-          <p:cNvPicPr>
-            <a:picLocks noChangeAspect="1"/>
-          </p:cNvPicPr>
-          <p:nvPr/>
-        </p:nvPicPr>
-        <p:blipFill>
-          <a:blip r:embed="rId2"/>
-          <a:stretch>
-            <a:fillRect/>
-          </a:stretch>
-        </p:blipFill>
-        <p:spPr>
-          <a:xfrm>
-            <a:off x="0" y="2343785"/>
-            <a:ext cx="12192000" cy="1524000"/>
-          </a:xfrm>
-          <a:prstGeom prst="rect">
-            <a:avLst/>
-          </a:prstGeom>
-        </p:spPr>
-      </p:pic>
-    </p:spTree>
-    <p:custDataLst>
-      <p:tags r:id="rId3"/>
-    </p:custDataLst>
-  </p:cSld>
-  <p:clrMapOvr>
-    <a:masterClrMapping/>
-  </p:clrMapOvr>
-</p:sld>
-</file>
-
-<file path=ppt/slides/slide4.xml><?xml version="1.0" encoding="utf-8"?>
 <p:sld xmlns:a="http://schemas.openxmlformats.org/drawingml/2006/main" xmlns:r="http://schemas.openxmlformats.org/officeDocument/2006/relationships" xmlns:p="http://schemas.openxmlformats.org/presentationml/2006/main">
   <p:cSld>
     <p:spTree>
@@ -4271,7 +4149,7 @@
 </p:sld>
 </file>
 
-<file path=ppt/slides/slide5.xml><?xml version="1.0" encoding="utf-8"?>
+<file path=ppt/slides/slide3.xml><?xml version="1.0" encoding="utf-8"?>
 <p:sld xmlns:a="http://schemas.openxmlformats.org/drawingml/2006/main" xmlns:r="http://schemas.openxmlformats.org/officeDocument/2006/relationships" xmlns:p="http://schemas.openxmlformats.org/presentationml/2006/main">
   <p:cSld>
     <p:spTree>
@@ -4281,637 +4159,9 @@
         <p:nvPr/>
       </p:nvGrpSpPr>
       <p:grpSpPr/>
-      <p:sp>
-        <p:nvSpPr>
-          <p:cNvPr id="4" name="文本框 3"/>
-          <p:cNvSpPr txBox="1"/>
-          <p:nvPr/>
-        </p:nvSpPr>
-        <p:spPr>
-          <a:xfrm>
-            <a:off x="0" y="0"/>
-            <a:ext cx="6096000" cy="368300"/>
-          </a:xfrm>
-          <a:prstGeom prst="rect">
-            <a:avLst/>
-          </a:prstGeom>
-          <a:noFill/>
-        </p:spPr>
-        <p:txBody>
-          <a:bodyPr wrap="square" rtlCol="0" anchor="t">
-            <a:spAutoFit/>
-          </a:bodyPr>
-          <a:p>
-            <a:r>
-              <a:rPr lang="en-US" altLang="zh-CN">
-                <a:latin typeface="Times New Roman" panose="02020603050405020304" charset="0"/>
-                <a:ea typeface="宋体" panose="02010600030101010101" pitchFamily="2" charset="-122"/>
-                <a:cs typeface="Times New Roman" panose="02020603050405020304" charset="0"/>
-              </a:rPr>
-              <a:t>qwen_flash.yaml :</a:t>
-            </a:r>
-            <a:r>
-              <a:rPr lang="zh-CN" altLang="en-US">
-                <a:latin typeface="Times New Roman" panose="02020603050405020304" charset="0"/>
-                <a:ea typeface="宋体" panose="02010600030101010101" pitchFamily="2" charset="-122"/>
-                <a:cs typeface="Times New Roman" panose="02020603050405020304" charset="0"/>
-              </a:rPr>
-              <a:t>配置所用的</a:t>
-            </a:r>
-            <a:r>
-              <a:rPr lang="en-US" altLang="zh-CN">
-                <a:latin typeface="Times New Roman" panose="02020603050405020304" charset="0"/>
-                <a:ea typeface="宋体" panose="02010600030101010101" pitchFamily="2" charset="-122"/>
-                <a:cs typeface="Times New Roman" panose="02020603050405020304" charset="0"/>
-              </a:rPr>
-              <a:t>LLM</a:t>
-            </a:r>
-            <a:endParaRPr lang="en-US" altLang="zh-CN">
-              <a:latin typeface="Times New Roman" panose="02020603050405020304" charset="0"/>
-              <a:ea typeface="宋体" panose="02010600030101010101" pitchFamily="2" charset="-122"/>
-              <a:cs typeface="Times New Roman" panose="02020603050405020304" charset="0"/>
-            </a:endParaRPr>
-          </a:p>
-        </p:txBody>
-      </p:sp>
-      <p:sp>
-        <p:nvSpPr>
-          <p:cNvPr id="5" name="文本框 4"/>
-          <p:cNvSpPr txBox="1"/>
-          <p:nvPr/>
-        </p:nvSpPr>
-        <p:spPr>
-          <a:xfrm>
-            <a:off x="139065" y="436245"/>
-            <a:ext cx="6096000" cy="4174490"/>
-          </a:xfrm>
-          <a:prstGeom prst="rect">
-            <a:avLst/>
-          </a:prstGeom>
-          <a:noFill/>
-        </p:spPr>
-        <p:txBody>
-          <a:bodyPr wrap="square" rtlCol="0" anchor="t">
-            <a:spAutoFit/>
-          </a:bodyPr>
-          <a:p>
-            <a:pPr marL="0" indent="0">
-              <a:lnSpc>
-                <a:spcPct val="100000"/>
-              </a:lnSpc>
-              <a:spcBef>
-                <a:spcPts val="1200"/>
-              </a:spcBef>
-              <a:spcAft>
-                <a:spcPts val="800"/>
-              </a:spcAft>
-            </a:pPr>
-            <a:r>
-              <a:rPr lang="zh-CN" altLang="en-US" sz="1600" b="1">
-                <a:latin typeface="宋体" panose="02010600030101010101" pitchFamily="2" charset="-122"/>
-                <a:ea typeface="宋体" panose="02010600030101010101" pitchFamily="2" charset="-122"/>
-                <a:cs typeface="宋体" panose="02010600030101010101" pitchFamily="2" charset="-122"/>
-                <a:sym typeface="+mn-ea"/>
-              </a:rPr>
-              <a:t>名称（</a:t>
-            </a:r>
-            <a:r>
-              <a:rPr lang="en-US" altLang="zh-CN" sz="1600" b="1">
-                <a:latin typeface="宋体" panose="02010600030101010101" pitchFamily="2" charset="-122"/>
-                <a:ea typeface="宋体" panose="02010600030101010101" pitchFamily="2" charset="-122"/>
-                <a:cs typeface="宋体" panose="02010600030101010101" pitchFamily="2" charset="-122"/>
-                <a:sym typeface="+mn-ea"/>
-              </a:rPr>
-              <a:t>name</a:t>
-            </a:r>
-            <a:r>
-              <a:rPr lang="zh-CN" altLang="en-US" sz="1600" b="1">
-                <a:latin typeface="宋体" panose="02010600030101010101" pitchFamily="2" charset="-122"/>
-                <a:ea typeface="宋体" panose="02010600030101010101" pitchFamily="2" charset="-122"/>
-                <a:cs typeface="宋体" panose="02010600030101010101" pitchFamily="2" charset="-122"/>
-                <a:sym typeface="+mn-ea"/>
-              </a:rPr>
-              <a:t>）</a:t>
-            </a:r>
-            <a:endParaRPr lang="zh-CN" altLang="en-US" sz="1600" b="1" i="0">
-              <a:solidFill>
-                <a:schemeClr val="tx1"/>
-              </a:solidFill>
-              <a:latin typeface="宋体" panose="02010600030101010101" pitchFamily="2" charset="-122"/>
-              <a:ea typeface="宋体" panose="02010600030101010101" pitchFamily="2" charset="-122"/>
-              <a:cs typeface="宋体" panose="02010600030101010101" pitchFamily="2" charset="-122"/>
-            </a:endParaRPr>
-          </a:p>
-          <a:p>
-            <a:pPr marL="0" indent="0">
-              <a:lnSpc>
-                <a:spcPct val="100000"/>
-              </a:lnSpc>
-              <a:spcBef>
-                <a:spcPct val="0"/>
-              </a:spcBef>
-              <a:spcAft>
-                <a:spcPts val="800"/>
-              </a:spcAft>
-            </a:pPr>
-            <a:r>
-              <a:rPr lang="zh-CN" altLang="en-US" sz="1600">
-                <a:latin typeface="宋体" panose="02010600030101010101" pitchFamily="2" charset="-122"/>
-                <a:ea typeface="宋体" panose="02010600030101010101" pitchFamily="2" charset="-122"/>
-                <a:cs typeface="宋体" panose="02010600030101010101" pitchFamily="2" charset="-122"/>
-                <a:sym typeface="+mn-ea"/>
-              </a:rPr>
-              <a:t>模型在系统中的唯一标识</a:t>
-            </a:r>
-            <a:endParaRPr lang="zh-CN" altLang="en-US" sz="1600">
-              <a:latin typeface="宋体" panose="02010600030101010101" pitchFamily="2" charset="-122"/>
-              <a:ea typeface="宋体" panose="02010600030101010101" pitchFamily="2" charset="-122"/>
-              <a:cs typeface="宋体" panose="02010600030101010101" pitchFamily="2" charset="-122"/>
-              <a:sym typeface="+mn-ea"/>
-            </a:endParaRPr>
-          </a:p>
-          <a:p>
-            <a:pPr marL="0" indent="0">
-              <a:lnSpc>
-                <a:spcPct val="100000"/>
-              </a:lnSpc>
-              <a:spcBef>
-                <a:spcPct val="0"/>
-              </a:spcBef>
-              <a:spcAft>
-                <a:spcPts val="800"/>
-              </a:spcAft>
-            </a:pPr>
-            <a:r>
-              <a:rPr lang="zh-CN" altLang="en-US" sz="1600" b="1">
-                <a:latin typeface="宋体" panose="02010600030101010101" pitchFamily="2" charset="-122"/>
-                <a:ea typeface="宋体" panose="02010600030101010101" pitchFamily="2" charset="-122"/>
-                <a:cs typeface="宋体" panose="02010600030101010101" pitchFamily="2" charset="-122"/>
-                <a:sym typeface="+mn-ea"/>
-              </a:rPr>
-              <a:t>介绍（</a:t>
-            </a:r>
-            <a:r>
-              <a:rPr lang="en-US" altLang="zh-CN" sz="1600" b="1">
-                <a:latin typeface="宋体" panose="02010600030101010101" pitchFamily="2" charset="-122"/>
-                <a:ea typeface="宋体" panose="02010600030101010101" pitchFamily="2" charset="-122"/>
-                <a:cs typeface="宋体" panose="02010600030101010101" pitchFamily="2" charset="-122"/>
-                <a:sym typeface="+mn-ea"/>
-              </a:rPr>
-              <a:t>description</a:t>
-            </a:r>
-            <a:r>
-              <a:rPr lang="zh-CN" altLang="en-US" sz="1600" b="1">
-                <a:latin typeface="宋体" panose="02010600030101010101" pitchFamily="2" charset="-122"/>
-                <a:ea typeface="宋体" panose="02010600030101010101" pitchFamily="2" charset="-122"/>
-                <a:cs typeface="宋体" panose="02010600030101010101" pitchFamily="2" charset="-122"/>
-                <a:sym typeface="+mn-ea"/>
-              </a:rPr>
-              <a:t>）</a:t>
-            </a:r>
-            <a:endParaRPr lang="zh-CN" altLang="en-US" sz="1600" b="1" i="0">
-              <a:solidFill>
-                <a:schemeClr val="tx1"/>
-              </a:solidFill>
-              <a:latin typeface="宋体" panose="02010600030101010101" pitchFamily="2" charset="-122"/>
-              <a:ea typeface="宋体" panose="02010600030101010101" pitchFamily="2" charset="-122"/>
-              <a:cs typeface="宋体" panose="02010600030101010101" pitchFamily="2" charset="-122"/>
-            </a:endParaRPr>
-          </a:p>
-          <a:p>
-            <a:pPr marL="0" indent="0">
-              <a:lnSpc>
-                <a:spcPct val="100000"/>
-              </a:lnSpc>
-              <a:spcBef>
-                <a:spcPct val="0"/>
-              </a:spcBef>
-              <a:spcAft>
-                <a:spcPts val="800"/>
-              </a:spcAft>
-            </a:pPr>
-            <a:r>
-              <a:rPr lang="zh-CN" altLang="en-US" sz="1600">
-                <a:latin typeface="宋体" panose="02010600030101010101" pitchFamily="2" charset="-122"/>
-                <a:ea typeface="宋体" panose="02010600030101010101" pitchFamily="2" charset="-122"/>
-                <a:cs typeface="宋体" panose="02010600030101010101" pitchFamily="2" charset="-122"/>
-                <a:sym typeface="+mn-ea"/>
-              </a:rPr>
-              <a:t>模型的简要描述</a:t>
-            </a:r>
-            <a:endParaRPr lang="zh-CN" altLang="en-US" sz="1600">
-              <a:latin typeface="宋体" panose="02010600030101010101" pitchFamily="2" charset="-122"/>
-              <a:ea typeface="宋体" panose="02010600030101010101" pitchFamily="2" charset="-122"/>
-              <a:cs typeface="宋体" panose="02010600030101010101" pitchFamily="2" charset="-122"/>
-              <a:sym typeface="+mn-ea"/>
-            </a:endParaRPr>
-          </a:p>
-          <a:p>
-            <a:pPr marL="0" indent="0">
-              <a:lnSpc>
-                <a:spcPct val="100000"/>
-              </a:lnSpc>
-              <a:spcBef>
-                <a:spcPct val="0"/>
-              </a:spcBef>
-              <a:spcAft>
-                <a:spcPts val="800"/>
-              </a:spcAft>
-            </a:pPr>
-            <a:r>
-              <a:rPr lang="zh-CN" altLang="en-US" sz="1600" b="1">
-                <a:latin typeface="宋体" panose="02010600030101010101" pitchFamily="2" charset="-122"/>
-                <a:ea typeface="宋体" panose="02010600030101010101" pitchFamily="2" charset="-122"/>
-                <a:cs typeface="宋体" panose="02010600030101010101" pitchFamily="2" charset="-122"/>
-                <a:sym typeface="+mn-ea"/>
-              </a:rPr>
-              <a:t>模型名称（</a:t>
-            </a:r>
-            <a:r>
-              <a:rPr lang="en-US" altLang="zh-CN" sz="1600" b="1">
-                <a:latin typeface="宋体" panose="02010600030101010101" pitchFamily="2" charset="-122"/>
-                <a:ea typeface="宋体" panose="02010600030101010101" pitchFamily="2" charset="-122"/>
-                <a:cs typeface="宋体" panose="02010600030101010101" pitchFamily="2" charset="-122"/>
-                <a:sym typeface="+mn-ea"/>
-              </a:rPr>
-              <a:t>model_name</a:t>
-            </a:r>
-            <a:r>
-              <a:rPr lang="zh-CN" altLang="en-US" sz="1600" b="1">
-                <a:latin typeface="宋体" panose="02010600030101010101" pitchFamily="2" charset="-122"/>
-                <a:ea typeface="宋体" panose="02010600030101010101" pitchFamily="2" charset="-122"/>
-                <a:cs typeface="宋体" panose="02010600030101010101" pitchFamily="2" charset="-122"/>
-                <a:sym typeface="+mn-ea"/>
-              </a:rPr>
-              <a:t>）</a:t>
-            </a:r>
-            <a:endParaRPr lang="zh-CN" altLang="en-US" sz="1600" b="1" i="0">
-              <a:solidFill>
-                <a:schemeClr val="tx1"/>
-              </a:solidFill>
-              <a:latin typeface="宋体" panose="02010600030101010101" pitchFamily="2" charset="-122"/>
-              <a:ea typeface="宋体" panose="02010600030101010101" pitchFamily="2" charset="-122"/>
-              <a:cs typeface="宋体" panose="02010600030101010101" pitchFamily="2" charset="-122"/>
-            </a:endParaRPr>
-          </a:p>
-          <a:p>
-            <a:pPr marL="0" indent="0">
-              <a:lnSpc>
-                <a:spcPct val="100000"/>
-              </a:lnSpc>
-              <a:spcBef>
-                <a:spcPct val="0"/>
-              </a:spcBef>
-              <a:spcAft>
-                <a:spcPts val="800"/>
-              </a:spcAft>
-            </a:pPr>
-            <a:r>
-              <a:rPr lang="zh-CN" altLang="en-US" sz="1600">
-                <a:latin typeface="宋体" panose="02010600030101010101" pitchFamily="2" charset="-122"/>
-                <a:ea typeface="宋体" panose="02010600030101010101" pitchFamily="2" charset="-122"/>
-                <a:cs typeface="宋体" panose="02010600030101010101" pitchFamily="2" charset="-122"/>
-                <a:sym typeface="+mn-ea"/>
-              </a:rPr>
-              <a:t>对应阿里百炼平台中实际调用的模型名称</a:t>
-            </a:r>
-            <a:endParaRPr lang="zh-CN" altLang="en-US" sz="1600">
-              <a:latin typeface="宋体" panose="02010600030101010101" pitchFamily="2" charset="-122"/>
-              <a:ea typeface="宋体" panose="02010600030101010101" pitchFamily="2" charset="-122"/>
-              <a:cs typeface="宋体" panose="02010600030101010101" pitchFamily="2" charset="-122"/>
-              <a:sym typeface="+mn-ea"/>
-            </a:endParaRPr>
-          </a:p>
-          <a:p>
-            <a:pPr marL="0" indent="0">
-              <a:lnSpc>
-                <a:spcPct val="100000"/>
-              </a:lnSpc>
-              <a:spcBef>
-                <a:spcPct val="0"/>
-              </a:spcBef>
-              <a:spcAft>
-                <a:spcPts val="800"/>
-              </a:spcAft>
-            </a:pPr>
-            <a:r>
-              <a:rPr lang="zh-CN" altLang="en-US" sz="1600" b="1">
-                <a:latin typeface="宋体" panose="02010600030101010101" pitchFamily="2" charset="-122"/>
-                <a:ea typeface="宋体" panose="02010600030101010101" pitchFamily="2" charset="-122"/>
-                <a:cs typeface="宋体" panose="02010600030101010101" pitchFamily="2" charset="-122"/>
-                <a:sym typeface="+mn-ea"/>
-              </a:rPr>
-              <a:t>最大</a:t>
-            </a:r>
-            <a:r>
-              <a:rPr lang="en-US" altLang="zh-CN" sz="1600" b="1">
-                <a:latin typeface="宋体" panose="02010600030101010101" pitchFamily="2" charset="-122"/>
-                <a:ea typeface="宋体" panose="02010600030101010101" pitchFamily="2" charset="-122"/>
-                <a:cs typeface="宋体" panose="02010600030101010101" pitchFamily="2" charset="-122"/>
-                <a:sym typeface="+mn-ea"/>
-              </a:rPr>
-              <a:t>token</a:t>
-            </a:r>
-            <a:r>
-              <a:rPr lang="zh-CN" altLang="en-US" sz="1600" b="1">
-                <a:latin typeface="宋体" panose="02010600030101010101" pitchFamily="2" charset="-122"/>
-                <a:ea typeface="宋体" panose="02010600030101010101" pitchFamily="2" charset="-122"/>
-                <a:cs typeface="宋体" panose="02010600030101010101" pitchFamily="2" charset="-122"/>
-                <a:sym typeface="+mn-ea"/>
-              </a:rPr>
-              <a:t>（</a:t>
-            </a:r>
-            <a:r>
-              <a:rPr lang="en-US" altLang="zh-CN" sz="1600" b="1">
-                <a:latin typeface="宋体" panose="02010600030101010101" pitchFamily="2" charset="-122"/>
-                <a:ea typeface="宋体" panose="02010600030101010101" pitchFamily="2" charset="-122"/>
-                <a:cs typeface="宋体" panose="02010600030101010101" pitchFamily="2" charset="-122"/>
-                <a:sym typeface="+mn-ea"/>
-              </a:rPr>
-              <a:t>max_tokens</a:t>
-            </a:r>
-            <a:r>
-              <a:rPr lang="zh-CN" altLang="en-US" sz="1600" b="1">
-                <a:latin typeface="宋体" panose="02010600030101010101" pitchFamily="2" charset="-122"/>
-                <a:ea typeface="宋体" panose="02010600030101010101" pitchFamily="2" charset="-122"/>
-                <a:cs typeface="宋体" panose="02010600030101010101" pitchFamily="2" charset="-122"/>
-                <a:sym typeface="+mn-ea"/>
-              </a:rPr>
-              <a:t>）</a:t>
-            </a:r>
-            <a:endParaRPr lang="zh-CN" altLang="en-US" sz="1600" b="1" i="0">
-              <a:solidFill>
-                <a:schemeClr val="tx1"/>
-              </a:solidFill>
-              <a:latin typeface="宋体" panose="02010600030101010101" pitchFamily="2" charset="-122"/>
-              <a:ea typeface="宋体" panose="02010600030101010101" pitchFamily="2" charset="-122"/>
-              <a:cs typeface="宋体" panose="02010600030101010101" pitchFamily="2" charset="-122"/>
-            </a:endParaRPr>
-          </a:p>
-          <a:p>
-            <a:pPr marL="0" indent="0">
-              <a:lnSpc>
-                <a:spcPct val="100000"/>
-              </a:lnSpc>
-              <a:spcBef>
-                <a:spcPct val="0"/>
-              </a:spcBef>
-              <a:spcAft>
-                <a:spcPts val="800"/>
-              </a:spcAft>
-            </a:pPr>
-            <a:r>
-              <a:rPr lang="zh-CN" altLang="en-US" sz="1600">
-                <a:latin typeface="宋体" panose="02010600030101010101" pitchFamily="2" charset="-122"/>
-                <a:ea typeface="宋体" panose="02010600030101010101" pitchFamily="2" charset="-122"/>
-                <a:cs typeface="宋体" panose="02010600030101010101" pitchFamily="2" charset="-122"/>
-                <a:sym typeface="+mn-ea"/>
-              </a:rPr>
-              <a:t>模型单次生成的最大</a:t>
-            </a:r>
-            <a:r>
-              <a:rPr lang="en-US" altLang="zh-CN" sz="1600">
-                <a:latin typeface="宋体" panose="02010600030101010101" pitchFamily="2" charset="-122"/>
-                <a:ea typeface="宋体" panose="02010600030101010101" pitchFamily="2" charset="-122"/>
-                <a:cs typeface="宋体" panose="02010600030101010101" pitchFamily="2" charset="-122"/>
-                <a:sym typeface="+mn-ea"/>
-              </a:rPr>
-              <a:t>token</a:t>
-            </a:r>
-            <a:r>
-              <a:rPr lang="zh-CN" altLang="en-US" sz="1600">
-                <a:latin typeface="宋体" panose="02010600030101010101" pitchFamily="2" charset="-122"/>
-                <a:ea typeface="宋体" panose="02010600030101010101" pitchFamily="2" charset="-122"/>
-                <a:cs typeface="宋体" panose="02010600030101010101" pitchFamily="2" charset="-122"/>
-                <a:sym typeface="+mn-ea"/>
-              </a:rPr>
-              <a:t>数量</a:t>
-            </a:r>
-            <a:endParaRPr lang="zh-CN" altLang="en-US" sz="1600">
-              <a:latin typeface="宋体" panose="02010600030101010101" pitchFamily="2" charset="-122"/>
-              <a:ea typeface="宋体" panose="02010600030101010101" pitchFamily="2" charset="-122"/>
-              <a:cs typeface="宋体" panose="02010600030101010101" pitchFamily="2" charset="-122"/>
-              <a:sym typeface="+mn-ea"/>
-            </a:endParaRPr>
-          </a:p>
-          <a:p>
-            <a:pPr marL="0" indent="0">
-              <a:lnSpc>
-                <a:spcPct val="100000"/>
-              </a:lnSpc>
-              <a:spcBef>
-                <a:spcPct val="0"/>
-              </a:spcBef>
-              <a:spcAft>
-                <a:spcPts val="800"/>
-              </a:spcAft>
-            </a:pPr>
-            <a:r>
-              <a:rPr lang="en-US" altLang="zh-CN" sz="1600" b="1">
-                <a:latin typeface="宋体" panose="02010600030101010101" pitchFamily="2" charset="-122"/>
-                <a:ea typeface="宋体" panose="02010600030101010101" pitchFamily="2" charset="-122"/>
-                <a:cs typeface="宋体" panose="02010600030101010101" pitchFamily="2" charset="-122"/>
-                <a:sym typeface="+mn-ea"/>
-              </a:rPr>
-              <a:t>api</a:t>
-            </a:r>
-            <a:r>
-              <a:rPr lang="zh-CN" altLang="en-US" sz="1600" b="1">
-                <a:latin typeface="宋体" panose="02010600030101010101" pitchFamily="2" charset="-122"/>
-                <a:ea typeface="宋体" panose="02010600030101010101" pitchFamily="2" charset="-122"/>
-                <a:cs typeface="宋体" panose="02010600030101010101" pitchFamily="2" charset="-122"/>
-                <a:sym typeface="+mn-ea"/>
-              </a:rPr>
-              <a:t>密钥（</a:t>
-            </a:r>
-            <a:r>
-              <a:rPr lang="en-US" altLang="zh-CN" sz="1600" b="1">
-                <a:latin typeface="宋体" panose="02010600030101010101" pitchFamily="2" charset="-122"/>
-                <a:ea typeface="宋体" panose="02010600030101010101" pitchFamily="2" charset="-122"/>
-                <a:cs typeface="宋体" panose="02010600030101010101" pitchFamily="2" charset="-122"/>
-                <a:sym typeface="+mn-ea"/>
-              </a:rPr>
-              <a:t>api_key</a:t>
-            </a:r>
-            <a:r>
-              <a:rPr lang="zh-CN" altLang="en-US" sz="1600" b="1">
-                <a:latin typeface="宋体" panose="02010600030101010101" pitchFamily="2" charset="-122"/>
-                <a:ea typeface="宋体" panose="02010600030101010101" pitchFamily="2" charset="-122"/>
-                <a:cs typeface="宋体" panose="02010600030101010101" pitchFamily="2" charset="-122"/>
-                <a:sym typeface="+mn-ea"/>
-              </a:rPr>
-              <a:t>）</a:t>
-            </a:r>
-            <a:endParaRPr lang="zh-CN" altLang="en-US" sz="1600" b="1" i="0">
-              <a:solidFill>
-                <a:schemeClr val="tx1"/>
-              </a:solidFill>
-              <a:latin typeface="宋体" panose="02010600030101010101" pitchFamily="2" charset="-122"/>
-              <a:ea typeface="宋体" panose="02010600030101010101" pitchFamily="2" charset="-122"/>
-              <a:cs typeface="宋体" panose="02010600030101010101" pitchFamily="2" charset="-122"/>
-            </a:endParaRPr>
-          </a:p>
-          <a:p>
-            <a:pPr marL="0" indent="0">
-              <a:lnSpc>
-                <a:spcPct val="100000"/>
-              </a:lnSpc>
-              <a:spcBef>
-                <a:spcPct val="0"/>
-              </a:spcBef>
-              <a:spcAft>
-                <a:spcPts val="800"/>
-              </a:spcAft>
-            </a:pPr>
-            <a:r>
-              <a:rPr lang="zh-CN" altLang="en-US" sz="1600">
-                <a:latin typeface="宋体" panose="02010600030101010101" pitchFamily="2" charset="-122"/>
-                <a:ea typeface="宋体" panose="02010600030101010101" pitchFamily="2" charset="-122"/>
-                <a:cs typeface="宋体" panose="02010600030101010101" pitchFamily="2" charset="-122"/>
-                <a:sym typeface="+mn-ea"/>
-              </a:rPr>
-              <a:t>阿里云百炼平台的</a:t>
-            </a:r>
-            <a:r>
-              <a:rPr lang="en-US" altLang="zh-CN" sz="1600">
-                <a:latin typeface="宋体" panose="02010600030101010101" pitchFamily="2" charset="-122"/>
-                <a:ea typeface="宋体" panose="02010600030101010101" pitchFamily="2" charset="-122"/>
-                <a:cs typeface="宋体" panose="02010600030101010101" pitchFamily="2" charset="-122"/>
-                <a:sym typeface="+mn-ea"/>
-              </a:rPr>
-              <a:t>API</a:t>
-            </a:r>
-            <a:r>
-              <a:rPr lang="zh-CN" altLang="en-US" sz="1600">
-                <a:latin typeface="宋体" panose="02010600030101010101" pitchFamily="2" charset="-122"/>
-                <a:ea typeface="宋体" panose="02010600030101010101" pitchFamily="2" charset="-122"/>
-                <a:cs typeface="宋体" panose="02010600030101010101" pitchFamily="2" charset="-122"/>
-                <a:sym typeface="+mn-ea"/>
-              </a:rPr>
-              <a:t>密钥</a:t>
-            </a:r>
-            <a:endParaRPr lang="zh-CN" altLang="en-US" sz="1600">
-              <a:latin typeface="宋体" panose="02010600030101010101" pitchFamily="2" charset="-122"/>
-              <a:ea typeface="宋体" panose="02010600030101010101" pitchFamily="2" charset="-122"/>
-              <a:cs typeface="宋体" panose="02010600030101010101" pitchFamily="2" charset="-122"/>
-              <a:sym typeface="+mn-ea"/>
-            </a:endParaRPr>
-          </a:p>
-          <a:p>
-            <a:pPr marL="0" indent="0">
-              <a:lnSpc>
-                <a:spcPct val="100000"/>
-              </a:lnSpc>
-              <a:spcBef>
-                <a:spcPct val="0"/>
-              </a:spcBef>
-              <a:spcAft>
-                <a:spcPts val="800"/>
-              </a:spcAft>
-            </a:pPr>
-            <a:r>
-              <a:rPr lang="zh-CN" altLang="en-US" sz="1600" b="1">
-                <a:latin typeface="宋体" panose="02010600030101010101" pitchFamily="2" charset="-122"/>
-                <a:ea typeface="宋体" panose="02010600030101010101" pitchFamily="2" charset="-122"/>
-                <a:cs typeface="宋体" panose="02010600030101010101" pitchFamily="2" charset="-122"/>
-                <a:sym typeface="+mn-ea"/>
-              </a:rPr>
-              <a:t>元数据</a:t>
-            </a:r>
-            <a:r>
-              <a:rPr lang="zh-CN" altLang="en-US" sz="1600" b="1">
-                <a:latin typeface="宋体" panose="02010600030101010101" pitchFamily="2" charset="-122"/>
-                <a:ea typeface="宋体" panose="02010600030101010101" pitchFamily="2" charset="-122"/>
-                <a:cs typeface="宋体" panose="02010600030101010101" pitchFamily="2" charset="-122"/>
-                <a:sym typeface="+mn-ea"/>
-              </a:rPr>
-              <a:t>（</a:t>
-            </a:r>
-            <a:r>
-              <a:rPr lang="en-US" altLang="zh-CN" sz="1600" b="1">
-                <a:latin typeface="宋体" panose="02010600030101010101" pitchFamily="2" charset="-122"/>
-                <a:ea typeface="宋体" panose="02010600030101010101" pitchFamily="2" charset="-122"/>
-                <a:cs typeface="宋体" panose="02010600030101010101" pitchFamily="2" charset="-122"/>
-                <a:sym typeface="+mn-ea"/>
-              </a:rPr>
-              <a:t>metadata</a:t>
-            </a:r>
-            <a:r>
-              <a:rPr lang="zh-CN" altLang="en-US" sz="1600" b="1">
-                <a:latin typeface="宋体" panose="02010600030101010101" pitchFamily="2" charset="-122"/>
-                <a:ea typeface="宋体" panose="02010600030101010101" pitchFamily="2" charset="-122"/>
-                <a:cs typeface="宋体" panose="02010600030101010101" pitchFamily="2" charset="-122"/>
-                <a:sym typeface="+mn-ea"/>
-              </a:rPr>
-              <a:t>）</a:t>
-            </a:r>
-            <a:endParaRPr lang="zh-CN" altLang="en-US" sz="1600" b="1">
-              <a:latin typeface="宋体" panose="02010600030101010101" pitchFamily="2" charset="-122"/>
-              <a:ea typeface="宋体" panose="02010600030101010101" pitchFamily="2" charset="-122"/>
-              <a:cs typeface="宋体" panose="02010600030101010101" pitchFamily="2" charset="-122"/>
-              <a:sym typeface="+mn-ea"/>
-            </a:endParaRPr>
-          </a:p>
-          <a:p>
-            <a:pPr marL="0" indent="0">
-              <a:lnSpc>
-                <a:spcPct val="100000"/>
-              </a:lnSpc>
-              <a:spcBef>
-                <a:spcPct val="0"/>
-              </a:spcBef>
-              <a:spcAft>
-                <a:spcPts val="800"/>
-              </a:spcAft>
-            </a:pPr>
-            <a:r>
-              <a:rPr lang="zh-CN" altLang="en-US" sz="1600">
-                <a:latin typeface="宋体" panose="02010600030101010101" pitchFamily="2" charset="-122"/>
-                <a:ea typeface="宋体" panose="02010600030101010101" pitchFamily="2" charset="-122"/>
-                <a:cs typeface="宋体" panose="02010600030101010101" pitchFamily="2" charset="-122"/>
-                <a:sym typeface="+mn-ea"/>
-              </a:rPr>
-              <a:t>指定实现该模型的</a:t>
-            </a:r>
-            <a:r>
-              <a:rPr lang="en-US" altLang="zh-CN" sz="1600">
-                <a:latin typeface="宋体" panose="02010600030101010101" pitchFamily="2" charset="-122"/>
-                <a:ea typeface="宋体" panose="02010600030101010101" pitchFamily="2" charset="-122"/>
-                <a:cs typeface="宋体" panose="02010600030101010101" pitchFamily="2" charset="-122"/>
-                <a:sym typeface="+mn-ea"/>
-              </a:rPr>
-              <a:t>Python</a:t>
-            </a:r>
-            <a:r>
-              <a:rPr lang="zh-CN" altLang="en-US" sz="1600">
-                <a:latin typeface="宋体" panose="02010600030101010101" pitchFamily="2" charset="-122"/>
-                <a:ea typeface="宋体" panose="02010600030101010101" pitchFamily="2" charset="-122"/>
-                <a:cs typeface="宋体" panose="02010600030101010101" pitchFamily="2" charset="-122"/>
-                <a:sym typeface="+mn-ea"/>
-              </a:rPr>
-              <a:t>模块路径</a:t>
-            </a:r>
-            <a:r>
-              <a:rPr lang="zh-CN" altLang="en-US" sz="1600">
-                <a:latin typeface="宋体" panose="02010600030101010101" pitchFamily="2" charset="-122"/>
-                <a:ea typeface="宋体" panose="02010600030101010101" pitchFamily="2" charset="-122"/>
-                <a:cs typeface="宋体" panose="02010600030101010101" pitchFamily="2" charset="-122"/>
-                <a:sym typeface="+mn-ea"/>
-              </a:rPr>
-              <a:t>以及指定具体的实现类</a:t>
-            </a:r>
-            <a:endParaRPr lang="zh-CN" altLang="en-US" sz="1600">
-              <a:latin typeface="宋体" panose="02010600030101010101" pitchFamily="2" charset="-122"/>
-              <a:ea typeface="宋体" panose="02010600030101010101" pitchFamily="2" charset="-122"/>
-              <a:cs typeface="宋体" panose="02010600030101010101" pitchFamily="2" charset="-122"/>
-              <a:sym typeface="+mn-ea"/>
-            </a:endParaRPr>
-          </a:p>
-        </p:txBody>
-      </p:sp>
       <p:pic>
         <p:nvPicPr>
-          <p:cNvPr id="6" name="图片 5"/>
+          <p:cNvPr id="4" name="图片 3"/>
           <p:cNvPicPr>
             <a:picLocks noChangeAspect="1"/>
           </p:cNvPicPr>
@@ -4925,14 +4175,897 @@
         </p:blipFill>
         <p:spPr>
           <a:xfrm>
-            <a:off x="5379720" y="436245"/>
-            <a:ext cx="5927090" cy="2497455"/>
+            <a:off x="4518025" y="205740"/>
+            <a:ext cx="7722870" cy="6265545"/>
           </a:xfrm>
           <a:prstGeom prst="rect">
             <a:avLst/>
           </a:prstGeom>
         </p:spPr>
       </p:pic>
+      <p:sp>
+        <p:nvSpPr>
+          <p:cNvPr id="5" name="文本框 4"/>
+          <p:cNvSpPr txBox="1"/>
+          <p:nvPr/>
+        </p:nvSpPr>
+        <p:spPr>
+          <a:xfrm>
+            <a:off x="104775" y="76200"/>
+            <a:ext cx="6096000" cy="368300"/>
+          </a:xfrm>
+          <a:prstGeom prst="rect">
+            <a:avLst/>
+          </a:prstGeom>
+          <a:noFill/>
+        </p:spPr>
+        <p:txBody>
+          <a:bodyPr wrap="square" rtlCol="0" anchor="t">
+            <a:spAutoFit/>
+          </a:bodyPr>
+          <a:p>
+            <a:r>
+              <a:rPr lang="en-US" altLang="zh-CN">
+                <a:latin typeface="Times New Roman" panose="02020603050405020304" charset="0"/>
+                <a:cs typeface="Times New Roman" panose="02020603050405020304" charset="0"/>
+              </a:rPr>
+              <a:t>rag_agent_template.py</a:t>
+            </a:r>
+            <a:endParaRPr lang="en-US" altLang="zh-CN">
+              <a:latin typeface="Times New Roman" panose="02020603050405020304" charset="0"/>
+              <a:cs typeface="Times New Roman" panose="02020603050405020304" charset="0"/>
+            </a:endParaRPr>
+          </a:p>
+        </p:txBody>
+      </p:sp>
+      <p:sp>
+        <p:nvSpPr>
+          <p:cNvPr id="6" name="文本框 5"/>
+          <p:cNvSpPr txBox="1"/>
+          <p:nvPr/>
+        </p:nvSpPr>
+        <p:spPr>
+          <a:xfrm>
+            <a:off x="213995" y="847725"/>
+            <a:ext cx="4389120" cy="1476375"/>
+          </a:xfrm>
+          <a:prstGeom prst="rect">
+            <a:avLst/>
+          </a:prstGeom>
+          <a:noFill/>
+        </p:spPr>
+        <p:txBody>
+          <a:bodyPr wrap="square" rtlCol="0" anchor="t">
+            <a:spAutoFit/>
+          </a:bodyPr>
+          <a:p>
+            <a:r>
+              <a:rPr lang="zh-CN" altLang="en-US"/>
+              <a:t>同步与异步两种路径会先调用工具和知识检索，把得到的</a:t>
+            </a:r>
+            <a:r>
+              <a:rPr lang="en-US" altLang="zh-CN"/>
+              <a:t> tool_res </a:t>
+            </a:r>
+            <a:r>
+              <a:rPr lang="zh-CN" altLang="en-US"/>
+              <a:t>与</a:t>
+            </a:r>
+            <a:r>
+              <a:rPr lang="en-US" altLang="zh-CN"/>
+              <a:t> knowledge_res</a:t>
+            </a:r>
+            <a:r>
+              <a:rPr lang="zh-CN" altLang="en-US"/>
+              <a:t>交由</a:t>
+            </a:r>
+            <a:r>
+              <a:rPr lang="en-US" altLang="zh-CN"/>
+              <a:t>Memory</a:t>
+            </a:r>
+            <a:r>
+              <a:rPr lang="zh-CN" altLang="en-US"/>
+              <a:t>、</a:t>
+            </a:r>
+            <a:r>
+              <a:rPr lang="en-US" altLang="zh-CN"/>
+              <a:t>LLM </a:t>
+            </a:r>
+            <a:r>
+              <a:rPr lang="zh-CN" altLang="en-US"/>
+              <a:t>与</a:t>
+            </a:r>
+            <a:r>
+              <a:rPr lang="en-US" altLang="zh-CN"/>
+              <a:t> Prompt </a:t>
+            </a:r>
+            <a:r>
+              <a:rPr lang="zh-CN" altLang="en-US"/>
+              <a:t>完成生成；此外</a:t>
+            </a:r>
+            <a:r>
+              <a:rPr lang="en-US" altLang="zh-CN"/>
+              <a:t>,</a:t>
+            </a:r>
+            <a:r>
+              <a:rPr lang="zh-CN" altLang="en-US"/>
+              <a:t>支持通过</a:t>
+            </a:r>
+            <a:r>
+              <a:rPr lang="en-US" altLang="zh-CN"/>
+              <a:t> AgentConfiger </a:t>
+            </a:r>
+            <a:r>
+              <a:rPr lang="zh-CN" altLang="en-US"/>
+              <a:t>初始化自身配置</a:t>
+            </a:r>
+            <a:endParaRPr lang="zh-CN" altLang="en-US"/>
+          </a:p>
+        </p:txBody>
+      </p:sp>
+    </p:spTree>
+    <p:custDataLst>
+      <p:tags r:id="rId2"/>
+    </p:custDataLst>
+  </p:cSld>
+  <p:clrMapOvr>
+    <a:masterClrMapping/>
+  </p:clrMapOvr>
+</p:sld>
+</file>
+
+<file path=ppt/slides/slide4.xml><?xml version="1.0" encoding="utf-8"?>
+<p:sld xmlns:a="http://schemas.openxmlformats.org/drawingml/2006/main" xmlns:r="http://schemas.openxmlformats.org/officeDocument/2006/relationships" xmlns:p="http://schemas.openxmlformats.org/presentationml/2006/main">
+  <p:cSld>
+    <p:spTree>
+      <p:nvGrpSpPr>
+        <p:cNvPr id="1" name=""/>
+        <p:cNvGrpSpPr/>
+        <p:nvPr/>
+      </p:nvGrpSpPr>
+      <p:grpSpPr/>
+      <p:sp>
+        <p:nvSpPr>
+          <p:cNvPr id="4" name="文本框 3"/>
+          <p:cNvSpPr txBox="1"/>
+          <p:nvPr/>
+        </p:nvSpPr>
+        <p:spPr>
+          <a:xfrm>
+            <a:off x="0" y="0"/>
+            <a:ext cx="6096000" cy="368300"/>
+          </a:xfrm>
+          <a:prstGeom prst="rect">
+            <a:avLst/>
+          </a:prstGeom>
+          <a:noFill/>
+        </p:spPr>
+        <p:txBody>
+          <a:bodyPr wrap="square" rtlCol="0" anchor="t">
+            <a:spAutoFit/>
+          </a:bodyPr>
+          <a:p>
+            <a:r>
+              <a:rPr lang="en-US" altLang="zh-CN">
+                <a:latin typeface="Times New Roman" panose="02020603050405020304" charset="0"/>
+                <a:ea typeface="宋体" panose="02010600030101010101" pitchFamily="2" charset="-122"/>
+                <a:cs typeface="Times New Roman" panose="02020603050405020304" charset="0"/>
+              </a:rPr>
+              <a:t>qwen_flash.yaml :</a:t>
+            </a:r>
+            <a:r>
+              <a:rPr lang="zh-CN" altLang="en-US">
+                <a:latin typeface="Times New Roman" panose="02020603050405020304" charset="0"/>
+                <a:ea typeface="宋体" panose="02010600030101010101" pitchFamily="2" charset="-122"/>
+                <a:cs typeface="Times New Roman" panose="02020603050405020304" charset="0"/>
+              </a:rPr>
+              <a:t>配置所用的</a:t>
+            </a:r>
+            <a:r>
+              <a:rPr lang="en-US" altLang="zh-CN">
+                <a:latin typeface="Times New Roman" panose="02020603050405020304" charset="0"/>
+                <a:ea typeface="宋体" panose="02010600030101010101" pitchFamily="2" charset="-122"/>
+                <a:cs typeface="Times New Roman" panose="02020603050405020304" charset="0"/>
+              </a:rPr>
+              <a:t>LLM</a:t>
+            </a:r>
+            <a:endParaRPr lang="en-US" altLang="zh-CN">
+              <a:latin typeface="Times New Roman" panose="02020603050405020304" charset="0"/>
+              <a:ea typeface="宋体" panose="02010600030101010101" pitchFamily="2" charset="-122"/>
+              <a:cs typeface="Times New Roman" panose="02020603050405020304" charset="0"/>
+            </a:endParaRPr>
+          </a:p>
+        </p:txBody>
+      </p:sp>
+      <p:sp>
+        <p:nvSpPr>
+          <p:cNvPr id="5" name="文本框 4"/>
+          <p:cNvSpPr txBox="1"/>
+          <p:nvPr/>
+        </p:nvSpPr>
+        <p:spPr>
+          <a:xfrm>
+            <a:off x="139065" y="436245"/>
+            <a:ext cx="6096000" cy="4174490"/>
+          </a:xfrm>
+          <a:prstGeom prst="rect">
+            <a:avLst/>
+          </a:prstGeom>
+          <a:noFill/>
+        </p:spPr>
+        <p:txBody>
+          <a:bodyPr wrap="square" rtlCol="0" anchor="t">
+            <a:spAutoFit/>
+          </a:bodyPr>
+          <a:p>
+            <a:pPr marL="0" indent="0">
+              <a:lnSpc>
+                <a:spcPct val="100000"/>
+              </a:lnSpc>
+              <a:spcBef>
+                <a:spcPts val="1200"/>
+              </a:spcBef>
+              <a:spcAft>
+                <a:spcPts val="800"/>
+              </a:spcAft>
+            </a:pPr>
+            <a:r>
+              <a:rPr lang="zh-CN" altLang="en-US" sz="1600" b="1">
+                <a:latin typeface="宋体" panose="02010600030101010101" pitchFamily="2" charset="-122"/>
+                <a:ea typeface="宋体" panose="02010600030101010101" pitchFamily="2" charset="-122"/>
+                <a:cs typeface="宋体" panose="02010600030101010101" pitchFamily="2" charset="-122"/>
+                <a:sym typeface="+mn-ea"/>
+              </a:rPr>
+              <a:t>名称（</a:t>
+            </a:r>
+            <a:r>
+              <a:rPr lang="en-US" altLang="zh-CN" sz="1600" b="1">
+                <a:latin typeface="宋体" panose="02010600030101010101" pitchFamily="2" charset="-122"/>
+                <a:ea typeface="宋体" panose="02010600030101010101" pitchFamily="2" charset="-122"/>
+                <a:cs typeface="宋体" panose="02010600030101010101" pitchFamily="2" charset="-122"/>
+                <a:sym typeface="+mn-ea"/>
+              </a:rPr>
+              <a:t>name</a:t>
+            </a:r>
+            <a:r>
+              <a:rPr lang="zh-CN" altLang="en-US" sz="1600" b="1">
+                <a:latin typeface="宋体" panose="02010600030101010101" pitchFamily="2" charset="-122"/>
+                <a:ea typeface="宋体" panose="02010600030101010101" pitchFamily="2" charset="-122"/>
+                <a:cs typeface="宋体" panose="02010600030101010101" pitchFamily="2" charset="-122"/>
+                <a:sym typeface="+mn-ea"/>
+              </a:rPr>
+              <a:t>）</a:t>
+            </a:r>
+            <a:endParaRPr lang="zh-CN" altLang="en-US" sz="1600" b="1" i="0">
+              <a:solidFill>
+                <a:schemeClr val="tx1"/>
+              </a:solidFill>
+              <a:latin typeface="宋体" panose="02010600030101010101" pitchFamily="2" charset="-122"/>
+              <a:ea typeface="宋体" panose="02010600030101010101" pitchFamily="2" charset="-122"/>
+              <a:cs typeface="宋体" panose="02010600030101010101" pitchFamily="2" charset="-122"/>
+            </a:endParaRPr>
+          </a:p>
+          <a:p>
+            <a:pPr marL="0" indent="0">
+              <a:lnSpc>
+                <a:spcPct val="100000"/>
+              </a:lnSpc>
+              <a:spcBef>
+                <a:spcPct val="0"/>
+              </a:spcBef>
+              <a:spcAft>
+                <a:spcPts val="800"/>
+              </a:spcAft>
+            </a:pPr>
+            <a:r>
+              <a:rPr lang="zh-CN" altLang="en-US" sz="1600">
+                <a:latin typeface="宋体" panose="02010600030101010101" pitchFamily="2" charset="-122"/>
+                <a:ea typeface="宋体" panose="02010600030101010101" pitchFamily="2" charset="-122"/>
+                <a:cs typeface="宋体" panose="02010600030101010101" pitchFamily="2" charset="-122"/>
+                <a:sym typeface="+mn-ea"/>
+              </a:rPr>
+              <a:t>模型在系统中的唯一标识</a:t>
+            </a:r>
+            <a:endParaRPr lang="zh-CN" altLang="en-US" sz="1600">
+              <a:latin typeface="宋体" panose="02010600030101010101" pitchFamily="2" charset="-122"/>
+              <a:ea typeface="宋体" panose="02010600030101010101" pitchFamily="2" charset="-122"/>
+              <a:cs typeface="宋体" panose="02010600030101010101" pitchFamily="2" charset="-122"/>
+              <a:sym typeface="+mn-ea"/>
+            </a:endParaRPr>
+          </a:p>
+          <a:p>
+            <a:pPr marL="0" indent="0">
+              <a:lnSpc>
+                <a:spcPct val="100000"/>
+              </a:lnSpc>
+              <a:spcBef>
+                <a:spcPct val="0"/>
+              </a:spcBef>
+              <a:spcAft>
+                <a:spcPts val="800"/>
+              </a:spcAft>
+            </a:pPr>
+            <a:r>
+              <a:rPr lang="zh-CN" altLang="en-US" sz="1600" b="1">
+                <a:latin typeface="宋体" panose="02010600030101010101" pitchFamily="2" charset="-122"/>
+                <a:ea typeface="宋体" panose="02010600030101010101" pitchFamily="2" charset="-122"/>
+                <a:cs typeface="宋体" panose="02010600030101010101" pitchFamily="2" charset="-122"/>
+                <a:sym typeface="+mn-ea"/>
+              </a:rPr>
+              <a:t>介绍（</a:t>
+            </a:r>
+            <a:r>
+              <a:rPr lang="en-US" altLang="zh-CN" sz="1600" b="1">
+                <a:latin typeface="宋体" panose="02010600030101010101" pitchFamily="2" charset="-122"/>
+                <a:ea typeface="宋体" panose="02010600030101010101" pitchFamily="2" charset="-122"/>
+                <a:cs typeface="宋体" panose="02010600030101010101" pitchFamily="2" charset="-122"/>
+                <a:sym typeface="+mn-ea"/>
+              </a:rPr>
+              <a:t>description</a:t>
+            </a:r>
+            <a:r>
+              <a:rPr lang="zh-CN" altLang="en-US" sz="1600" b="1">
+                <a:latin typeface="宋体" panose="02010600030101010101" pitchFamily="2" charset="-122"/>
+                <a:ea typeface="宋体" panose="02010600030101010101" pitchFamily="2" charset="-122"/>
+                <a:cs typeface="宋体" panose="02010600030101010101" pitchFamily="2" charset="-122"/>
+                <a:sym typeface="+mn-ea"/>
+              </a:rPr>
+              <a:t>）</a:t>
+            </a:r>
+            <a:endParaRPr lang="zh-CN" altLang="en-US" sz="1600" b="1" i="0">
+              <a:solidFill>
+                <a:schemeClr val="tx1"/>
+              </a:solidFill>
+              <a:latin typeface="宋体" panose="02010600030101010101" pitchFamily="2" charset="-122"/>
+              <a:ea typeface="宋体" panose="02010600030101010101" pitchFamily="2" charset="-122"/>
+              <a:cs typeface="宋体" panose="02010600030101010101" pitchFamily="2" charset="-122"/>
+            </a:endParaRPr>
+          </a:p>
+          <a:p>
+            <a:pPr marL="0" indent="0">
+              <a:lnSpc>
+                <a:spcPct val="100000"/>
+              </a:lnSpc>
+              <a:spcBef>
+                <a:spcPct val="0"/>
+              </a:spcBef>
+              <a:spcAft>
+                <a:spcPts val="800"/>
+              </a:spcAft>
+            </a:pPr>
+            <a:r>
+              <a:rPr lang="zh-CN" altLang="en-US" sz="1600">
+                <a:latin typeface="宋体" panose="02010600030101010101" pitchFamily="2" charset="-122"/>
+                <a:ea typeface="宋体" panose="02010600030101010101" pitchFamily="2" charset="-122"/>
+                <a:cs typeface="宋体" panose="02010600030101010101" pitchFamily="2" charset="-122"/>
+                <a:sym typeface="+mn-ea"/>
+              </a:rPr>
+              <a:t>模型的简要描述</a:t>
+            </a:r>
+            <a:endParaRPr lang="zh-CN" altLang="en-US" sz="1600">
+              <a:latin typeface="宋体" panose="02010600030101010101" pitchFamily="2" charset="-122"/>
+              <a:ea typeface="宋体" panose="02010600030101010101" pitchFamily="2" charset="-122"/>
+              <a:cs typeface="宋体" panose="02010600030101010101" pitchFamily="2" charset="-122"/>
+              <a:sym typeface="+mn-ea"/>
+            </a:endParaRPr>
+          </a:p>
+          <a:p>
+            <a:pPr marL="0" indent="0">
+              <a:lnSpc>
+                <a:spcPct val="100000"/>
+              </a:lnSpc>
+              <a:spcBef>
+                <a:spcPct val="0"/>
+              </a:spcBef>
+              <a:spcAft>
+                <a:spcPts val="800"/>
+              </a:spcAft>
+            </a:pPr>
+            <a:r>
+              <a:rPr lang="zh-CN" altLang="en-US" sz="1600" b="1">
+                <a:latin typeface="宋体" panose="02010600030101010101" pitchFamily="2" charset="-122"/>
+                <a:ea typeface="宋体" panose="02010600030101010101" pitchFamily="2" charset="-122"/>
+                <a:cs typeface="宋体" panose="02010600030101010101" pitchFamily="2" charset="-122"/>
+                <a:sym typeface="+mn-ea"/>
+              </a:rPr>
+              <a:t>模型名称（</a:t>
+            </a:r>
+            <a:r>
+              <a:rPr lang="en-US" altLang="zh-CN" sz="1600" b="1">
+                <a:latin typeface="宋体" panose="02010600030101010101" pitchFamily="2" charset="-122"/>
+                <a:ea typeface="宋体" panose="02010600030101010101" pitchFamily="2" charset="-122"/>
+                <a:cs typeface="宋体" panose="02010600030101010101" pitchFamily="2" charset="-122"/>
+                <a:sym typeface="+mn-ea"/>
+              </a:rPr>
+              <a:t>model_name</a:t>
+            </a:r>
+            <a:r>
+              <a:rPr lang="zh-CN" altLang="en-US" sz="1600" b="1">
+                <a:latin typeface="宋体" panose="02010600030101010101" pitchFamily="2" charset="-122"/>
+                <a:ea typeface="宋体" panose="02010600030101010101" pitchFamily="2" charset="-122"/>
+                <a:cs typeface="宋体" panose="02010600030101010101" pitchFamily="2" charset="-122"/>
+                <a:sym typeface="+mn-ea"/>
+              </a:rPr>
+              <a:t>）</a:t>
+            </a:r>
+            <a:endParaRPr lang="zh-CN" altLang="en-US" sz="1600" b="1" i="0">
+              <a:solidFill>
+                <a:schemeClr val="tx1"/>
+              </a:solidFill>
+              <a:latin typeface="宋体" panose="02010600030101010101" pitchFamily="2" charset="-122"/>
+              <a:ea typeface="宋体" panose="02010600030101010101" pitchFamily="2" charset="-122"/>
+              <a:cs typeface="宋体" panose="02010600030101010101" pitchFamily="2" charset="-122"/>
+            </a:endParaRPr>
+          </a:p>
+          <a:p>
+            <a:pPr marL="0" indent="0">
+              <a:lnSpc>
+                <a:spcPct val="100000"/>
+              </a:lnSpc>
+              <a:spcBef>
+                <a:spcPct val="0"/>
+              </a:spcBef>
+              <a:spcAft>
+                <a:spcPts val="800"/>
+              </a:spcAft>
+            </a:pPr>
+            <a:r>
+              <a:rPr lang="zh-CN" altLang="en-US" sz="1600">
+                <a:latin typeface="宋体" panose="02010600030101010101" pitchFamily="2" charset="-122"/>
+                <a:ea typeface="宋体" panose="02010600030101010101" pitchFamily="2" charset="-122"/>
+                <a:cs typeface="宋体" panose="02010600030101010101" pitchFamily="2" charset="-122"/>
+                <a:sym typeface="+mn-ea"/>
+              </a:rPr>
+              <a:t>对应阿里百炼平台中实际调用的模型名称</a:t>
+            </a:r>
+            <a:endParaRPr lang="zh-CN" altLang="en-US" sz="1600">
+              <a:latin typeface="宋体" panose="02010600030101010101" pitchFamily="2" charset="-122"/>
+              <a:ea typeface="宋体" panose="02010600030101010101" pitchFamily="2" charset="-122"/>
+              <a:cs typeface="宋体" panose="02010600030101010101" pitchFamily="2" charset="-122"/>
+              <a:sym typeface="+mn-ea"/>
+            </a:endParaRPr>
+          </a:p>
+          <a:p>
+            <a:pPr marL="0" indent="0">
+              <a:lnSpc>
+                <a:spcPct val="100000"/>
+              </a:lnSpc>
+              <a:spcBef>
+                <a:spcPct val="0"/>
+              </a:spcBef>
+              <a:spcAft>
+                <a:spcPts val="800"/>
+              </a:spcAft>
+            </a:pPr>
+            <a:r>
+              <a:rPr lang="zh-CN" altLang="en-US" sz="1600" b="1">
+                <a:latin typeface="宋体" panose="02010600030101010101" pitchFamily="2" charset="-122"/>
+                <a:ea typeface="宋体" panose="02010600030101010101" pitchFamily="2" charset="-122"/>
+                <a:cs typeface="宋体" panose="02010600030101010101" pitchFamily="2" charset="-122"/>
+                <a:sym typeface="+mn-ea"/>
+              </a:rPr>
+              <a:t>最大</a:t>
+            </a:r>
+            <a:r>
+              <a:rPr lang="en-US" altLang="zh-CN" sz="1600" b="1">
+                <a:latin typeface="宋体" panose="02010600030101010101" pitchFamily="2" charset="-122"/>
+                <a:ea typeface="宋体" panose="02010600030101010101" pitchFamily="2" charset="-122"/>
+                <a:cs typeface="宋体" panose="02010600030101010101" pitchFamily="2" charset="-122"/>
+                <a:sym typeface="+mn-ea"/>
+              </a:rPr>
+              <a:t>token</a:t>
+            </a:r>
+            <a:r>
+              <a:rPr lang="zh-CN" altLang="en-US" sz="1600" b="1">
+                <a:latin typeface="宋体" panose="02010600030101010101" pitchFamily="2" charset="-122"/>
+                <a:ea typeface="宋体" panose="02010600030101010101" pitchFamily="2" charset="-122"/>
+                <a:cs typeface="宋体" panose="02010600030101010101" pitchFamily="2" charset="-122"/>
+                <a:sym typeface="+mn-ea"/>
+              </a:rPr>
+              <a:t>（</a:t>
+            </a:r>
+            <a:r>
+              <a:rPr lang="en-US" altLang="zh-CN" sz="1600" b="1">
+                <a:latin typeface="宋体" panose="02010600030101010101" pitchFamily="2" charset="-122"/>
+                <a:ea typeface="宋体" panose="02010600030101010101" pitchFamily="2" charset="-122"/>
+                <a:cs typeface="宋体" panose="02010600030101010101" pitchFamily="2" charset="-122"/>
+                <a:sym typeface="+mn-ea"/>
+              </a:rPr>
+              <a:t>max_tokens</a:t>
+            </a:r>
+            <a:r>
+              <a:rPr lang="zh-CN" altLang="en-US" sz="1600" b="1">
+                <a:latin typeface="宋体" panose="02010600030101010101" pitchFamily="2" charset="-122"/>
+                <a:ea typeface="宋体" panose="02010600030101010101" pitchFamily="2" charset="-122"/>
+                <a:cs typeface="宋体" panose="02010600030101010101" pitchFamily="2" charset="-122"/>
+                <a:sym typeface="+mn-ea"/>
+              </a:rPr>
+              <a:t>）</a:t>
+            </a:r>
+            <a:endParaRPr lang="zh-CN" altLang="en-US" sz="1600" b="1" i="0">
+              <a:solidFill>
+                <a:schemeClr val="tx1"/>
+              </a:solidFill>
+              <a:latin typeface="宋体" panose="02010600030101010101" pitchFamily="2" charset="-122"/>
+              <a:ea typeface="宋体" panose="02010600030101010101" pitchFamily="2" charset="-122"/>
+              <a:cs typeface="宋体" panose="02010600030101010101" pitchFamily="2" charset="-122"/>
+            </a:endParaRPr>
+          </a:p>
+          <a:p>
+            <a:pPr marL="0" indent="0">
+              <a:lnSpc>
+                <a:spcPct val="100000"/>
+              </a:lnSpc>
+              <a:spcBef>
+                <a:spcPct val="0"/>
+              </a:spcBef>
+              <a:spcAft>
+                <a:spcPts val="800"/>
+              </a:spcAft>
+            </a:pPr>
+            <a:r>
+              <a:rPr lang="zh-CN" altLang="en-US" sz="1600">
+                <a:latin typeface="宋体" panose="02010600030101010101" pitchFamily="2" charset="-122"/>
+                <a:ea typeface="宋体" panose="02010600030101010101" pitchFamily="2" charset="-122"/>
+                <a:cs typeface="宋体" panose="02010600030101010101" pitchFamily="2" charset="-122"/>
+                <a:sym typeface="+mn-ea"/>
+              </a:rPr>
+              <a:t>模型单次生成的最大</a:t>
+            </a:r>
+            <a:r>
+              <a:rPr lang="en-US" altLang="zh-CN" sz="1600">
+                <a:latin typeface="宋体" panose="02010600030101010101" pitchFamily="2" charset="-122"/>
+                <a:ea typeface="宋体" panose="02010600030101010101" pitchFamily="2" charset="-122"/>
+                <a:cs typeface="宋体" panose="02010600030101010101" pitchFamily="2" charset="-122"/>
+                <a:sym typeface="+mn-ea"/>
+              </a:rPr>
+              <a:t>token</a:t>
+            </a:r>
+            <a:r>
+              <a:rPr lang="zh-CN" altLang="en-US" sz="1600">
+                <a:latin typeface="宋体" panose="02010600030101010101" pitchFamily="2" charset="-122"/>
+                <a:ea typeface="宋体" panose="02010600030101010101" pitchFamily="2" charset="-122"/>
+                <a:cs typeface="宋体" panose="02010600030101010101" pitchFamily="2" charset="-122"/>
+                <a:sym typeface="+mn-ea"/>
+              </a:rPr>
+              <a:t>数量</a:t>
+            </a:r>
+            <a:endParaRPr lang="zh-CN" altLang="en-US" sz="1600">
+              <a:latin typeface="宋体" panose="02010600030101010101" pitchFamily="2" charset="-122"/>
+              <a:ea typeface="宋体" panose="02010600030101010101" pitchFamily="2" charset="-122"/>
+              <a:cs typeface="宋体" panose="02010600030101010101" pitchFamily="2" charset="-122"/>
+              <a:sym typeface="+mn-ea"/>
+            </a:endParaRPr>
+          </a:p>
+          <a:p>
+            <a:pPr marL="0" indent="0">
+              <a:lnSpc>
+                <a:spcPct val="100000"/>
+              </a:lnSpc>
+              <a:spcBef>
+                <a:spcPct val="0"/>
+              </a:spcBef>
+              <a:spcAft>
+                <a:spcPts val="800"/>
+              </a:spcAft>
+            </a:pPr>
+            <a:r>
+              <a:rPr lang="en-US" altLang="zh-CN" sz="1600" b="1">
+                <a:latin typeface="宋体" panose="02010600030101010101" pitchFamily="2" charset="-122"/>
+                <a:ea typeface="宋体" panose="02010600030101010101" pitchFamily="2" charset="-122"/>
+                <a:cs typeface="宋体" panose="02010600030101010101" pitchFamily="2" charset="-122"/>
+                <a:sym typeface="+mn-ea"/>
+              </a:rPr>
+              <a:t>api</a:t>
+            </a:r>
+            <a:r>
+              <a:rPr lang="zh-CN" altLang="en-US" sz="1600" b="1">
+                <a:latin typeface="宋体" panose="02010600030101010101" pitchFamily="2" charset="-122"/>
+                <a:ea typeface="宋体" panose="02010600030101010101" pitchFamily="2" charset="-122"/>
+                <a:cs typeface="宋体" panose="02010600030101010101" pitchFamily="2" charset="-122"/>
+                <a:sym typeface="+mn-ea"/>
+              </a:rPr>
+              <a:t>密钥（</a:t>
+            </a:r>
+            <a:r>
+              <a:rPr lang="en-US" altLang="zh-CN" sz="1600" b="1">
+                <a:latin typeface="宋体" panose="02010600030101010101" pitchFamily="2" charset="-122"/>
+                <a:ea typeface="宋体" panose="02010600030101010101" pitchFamily="2" charset="-122"/>
+                <a:cs typeface="宋体" panose="02010600030101010101" pitchFamily="2" charset="-122"/>
+                <a:sym typeface="+mn-ea"/>
+              </a:rPr>
+              <a:t>api_key</a:t>
+            </a:r>
+            <a:r>
+              <a:rPr lang="zh-CN" altLang="en-US" sz="1600" b="1">
+                <a:latin typeface="宋体" panose="02010600030101010101" pitchFamily="2" charset="-122"/>
+                <a:ea typeface="宋体" panose="02010600030101010101" pitchFamily="2" charset="-122"/>
+                <a:cs typeface="宋体" panose="02010600030101010101" pitchFamily="2" charset="-122"/>
+                <a:sym typeface="+mn-ea"/>
+              </a:rPr>
+              <a:t>）</a:t>
+            </a:r>
+            <a:endParaRPr lang="zh-CN" altLang="en-US" sz="1600" b="1" i="0">
+              <a:solidFill>
+                <a:schemeClr val="tx1"/>
+              </a:solidFill>
+              <a:latin typeface="宋体" panose="02010600030101010101" pitchFamily="2" charset="-122"/>
+              <a:ea typeface="宋体" panose="02010600030101010101" pitchFamily="2" charset="-122"/>
+              <a:cs typeface="宋体" panose="02010600030101010101" pitchFamily="2" charset="-122"/>
+            </a:endParaRPr>
+          </a:p>
+          <a:p>
+            <a:pPr marL="0" indent="0">
+              <a:lnSpc>
+                <a:spcPct val="100000"/>
+              </a:lnSpc>
+              <a:spcBef>
+                <a:spcPct val="0"/>
+              </a:spcBef>
+              <a:spcAft>
+                <a:spcPts val="800"/>
+              </a:spcAft>
+            </a:pPr>
+            <a:r>
+              <a:rPr lang="zh-CN" altLang="en-US" sz="1600">
+                <a:latin typeface="宋体" panose="02010600030101010101" pitchFamily="2" charset="-122"/>
+                <a:ea typeface="宋体" panose="02010600030101010101" pitchFamily="2" charset="-122"/>
+                <a:cs typeface="宋体" panose="02010600030101010101" pitchFamily="2" charset="-122"/>
+                <a:sym typeface="+mn-ea"/>
+              </a:rPr>
+              <a:t>阿里云百炼平台的</a:t>
+            </a:r>
+            <a:r>
+              <a:rPr lang="en-US" altLang="zh-CN" sz="1600">
+                <a:latin typeface="宋体" panose="02010600030101010101" pitchFamily="2" charset="-122"/>
+                <a:ea typeface="宋体" panose="02010600030101010101" pitchFamily="2" charset="-122"/>
+                <a:cs typeface="宋体" panose="02010600030101010101" pitchFamily="2" charset="-122"/>
+                <a:sym typeface="+mn-ea"/>
+              </a:rPr>
+              <a:t>API</a:t>
+            </a:r>
+            <a:r>
+              <a:rPr lang="zh-CN" altLang="en-US" sz="1600">
+                <a:latin typeface="宋体" panose="02010600030101010101" pitchFamily="2" charset="-122"/>
+                <a:ea typeface="宋体" panose="02010600030101010101" pitchFamily="2" charset="-122"/>
+                <a:cs typeface="宋体" panose="02010600030101010101" pitchFamily="2" charset="-122"/>
+                <a:sym typeface="+mn-ea"/>
+              </a:rPr>
+              <a:t>密钥</a:t>
+            </a:r>
+            <a:endParaRPr lang="zh-CN" altLang="en-US" sz="1600">
+              <a:latin typeface="宋体" panose="02010600030101010101" pitchFamily="2" charset="-122"/>
+              <a:ea typeface="宋体" panose="02010600030101010101" pitchFamily="2" charset="-122"/>
+              <a:cs typeface="宋体" panose="02010600030101010101" pitchFamily="2" charset="-122"/>
+              <a:sym typeface="+mn-ea"/>
+            </a:endParaRPr>
+          </a:p>
+          <a:p>
+            <a:pPr marL="0" indent="0">
+              <a:lnSpc>
+                <a:spcPct val="100000"/>
+              </a:lnSpc>
+              <a:spcBef>
+                <a:spcPct val="0"/>
+              </a:spcBef>
+              <a:spcAft>
+                <a:spcPts val="800"/>
+              </a:spcAft>
+            </a:pPr>
+            <a:r>
+              <a:rPr lang="zh-CN" altLang="en-US" sz="1600" b="1">
+                <a:latin typeface="宋体" panose="02010600030101010101" pitchFamily="2" charset="-122"/>
+                <a:ea typeface="宋体" panose="02010600030101010101" pitchFamily="2" charset="-122"/>
+                <a:cs typeface="宋体" panose="02010600030101010101" pitchFamily="2" charset="-122"/>
+                <a:sym typeface="+mn-ea"/>
+              </a:rPr>
+              <a:t>元数据</a:t>
+            </a:r>
+            <a:r>
+              <a:rPr lang="zh-CN" altLang="en-US" sz="1600" b="1">
+                <a:latin typeface="宋体" panose="02010600030101010101" pitchFamily="2" charset="-122"/>
+                <a:ea typeface="宋体" panose="02010600030101010101" pitchFamily="2" charset="-122"/>
+                <a:cs typeface="宋体" panose="02010600030101010101" pitchFamily="2" charset="-122"/>
+                <a:sym typeface="+mn-ea"/>
+              </a:rPr>
+              <a:t>（</a:t>
+            </a:r>
+            <a:r>
+              <a:rPr lang="en-US" altLang="zh-CN" sz="1600" b="1">
+                <a:latin typeface="宋体" panose="02010600030101010101" pitchFamily="2" charset="-122"/>
+                <a:ea typeface="宋体" panose="02010600030101010101" pitchFamily="2" charset="-122"/>
+                <a:cs typeface="宋体" panose="02010600030101010101" pitchFamily="2" charset="-122"/>
+                <a:sym typeface="+mn-ea"/>
+              </a:rPr>
+              <a:t>metadata</a:t>
+            </a:r>
+            <a:r>
+              <a:rPr lang="zh-CN" altLang="en-US" sz="1600" b="1">
+                <a:latin typeface="宋体" panose="02010600030101010101" pitchFamily="2" charset="-122"/>
+                <a:ea typeface="宋体" panose="02010600030101010101" pitchFamily="2" charset="-122"/>
+                <a:cs typeface="宋体" panose="02010600030101010101" pitchFamily="2" charset="-122"/>
+                <a:sym typeface="+mn-ea"/>
+              </a:rPr>
+              <a:t>）</a:t>
+            </a:r>
+            <a:endParaRPr lang="zh-CN" altLang="en-US" sz="1600" b="1">
+              <a:latin typeface="宋体" panose="02010600030101010101" pitchFamily="2" charset="-122"/>
+              <a:ea typeface="宋体" panose="02010600030101010101" pitchFamily="2" charset="-122"/>
+              <a:cs typeface="宋体" panose="02010600030101010101" pitchFamily="2" charset="-122"/>
+              <a:sym typeface="+mn-ea"/>
+            </a:endParaRPr>
+          </a:p>
+          <a:p>
+            <a:pPr marL="0" indent="0">
+              <a:lnSpc>
+                <a:spcPct val="100000"/>
+              </a:lnSpc>
+              <a:spcBef>
+                <a:spcPct val="0"/>
+              </a:spcBef>
+              <a:spcAft>
+                <a:spcPts val="800"/>
+              </a:spcAft>
+            </a:pPr>
+            <a:r>
+              <a:rPr lang="zh-CN" altLang="en-US" sz="1600">
+                <a:latin typeface="宋体" panose="02010600030101010101" pitchFamily="2" charset="-122"/>
+                <a:ea typeface="宋体" panose="02010600030101010101" pitchFamily="2" charset="-122"/>
+                <a:cs typeface="宋体" panose="02010600030101010101" pitchFamily="2" charset="-122"/>
+                <a:sym typeface="+mn-ea"/>
+              </a:rPr>
+              <a:t>指定实现该模型的</a:t>
+            </a:r>
+            <a:r>
+              <a:rPr lang="en-US" altLang="zh-CN" sz="1600">
+                <a:latin typeface="宋体" panose="02010600030101010101" pitchFamily="2" charset="-122"/>
+                <a:ea typeface="宋体" panose="02010600030101010101" pitchFamily="2" charset="-122"/>
+                <a:cs typeface="宋体" panose="02010600030101010101" pitchFamily="2" charset="-122"/>
+                <a:sym typeface="+mn-ea"/>
+              </a:rPr>
+              <a:t>Python</a:t>
+            </a:r>
+            <a:r>
+              <a:rPr lang="zh-CN" altLang="en-US" sz="1600">
+                <a:latin typeface="宋体" panose="02010600030101010101" pitchFamily="2" charset="-122"/>
+                <a:ea typeface="宋体" panose="02010600030101010101" pitchFamily="2" charset="-122"/>
+                <a:cs typeface="宋体" panose="02010600030101010101" pitchFamily="2" charset="-122"/>
+                <a:sym typeface="+mn-ea"/>
+              </a:rPr>
+              <a:t>模块路径</a:t>
+            </a:r>
+            <a:r>
+              <a:rPr lang="zh-CN" altLang="en-US" sz="1600">
+                <a:latin typeface="宋体" panose="02010600030101010101" pitchFamily="2" charset="-122"/>
+                <a:ea typeface="宋体" panose="02010600030101010101" pitchFamily="2" charset="-122"/>
+                <a:cs typeface="宋体" panose="02010600030101010101" pitchFamily="2" charset="-122"/>
+                <a:sym typeface="+mn-ea"/>
+              </a:rPr>
+              <a:t>以及指定具体的实现类</a:t>
+            </a:r>
+            <a:endParaRPr lang="zh-CN" altLang="en-US" sz="1600">
+              <a:latin typeface="宋体" panose="02010600030101010101" pitchFamily="2" charset="-122"/>
+              <a:ea typeface="宋体" panose="02010600030101010101" pitchFamily="2" charset="-122"/>
+              <a:cs typeface="宋体" panose="02010600030101010101" pitchFamily="2" charset="-122"/>
+              <a:sym typeface="+mn-ea"/>
+            </a:endParaRPr>
+          </a:p>
+        </p:txBody>
+      </p:sp>
+      <p:pic>
+        <p:nvPicPr>
+          <p:cNvPr id="2" name="图片 1"/>
+          <p:cNvPicPr>
+            <a:picLocks noChangeAspect="1"/>
+          </p:cNvPicPr>
+          <p:nvPr/>
+        </p:nvPicPr>
+        <p:blipFill>
+          <a:blip r:embed="rId1"/>
+          <a:stretch>
+            <a:fillRect/>
+          </a:stretch>
+        </p:blipFill>
+        <p:spPr>
+          <a:xfrm>
+            <a:off x="6316980" y="436245"/>
+            <a:ext cx="4196715" cy="2901315"/>
+          </a:xfrm>
+          <a:prstGeom prst="rect">
+            <a:avLst/>
+          </a:prstGeom>
+        </p:spPr>
+      </p:pic>
+    </p:spTree>
+    <p:custDataLst>
+      <p:tags r:id="rId2"/>
+    </p:custDataLst>
+  </p:cSld>
+  <p:clrMapOvr>
+    <a:masterClrMapping/>
+  </p:clrMapOvr>
+</p:sld>
+</file>
+
+<file path=ppt/slides/slide5.xml><?xml version="1.0" encoding="utf-8"?>
+<p:sld xmlns:a="http://schemas.openxmlformats.org/drawingml/2006/main" xmlns:r="http://schemas.openxmlformats.org/officeDocument/2006/relationships" xmlns:p="http://schemas.openxmlformats.org/presentationml/2006/main">
+  <p:cSld>
+    <p:spTree>
+      <p:nvGrpSpPr>
+        <p:cNvPr id="1" name=""/>
+        <p:cNvGrpSpPr/>
+        <p:nvPr/>
+      </p:nvGrpSpPr>
+      <p:grpSpPr/>
+      <p:pic>
+        <p:nvPicPr>
+          <p:cNvPr id="4" name="图片 3"/>
+          <p:cNvPicPr>
+            <a:picLocks noChangeAspect="1"/>
+          </p:cNvPicPr>
+          <p:nvPr/>
+        </p:nvPicPr>
+        <p:blipFill>
+          <a:blip r:embed="rId1"/>
+          <a:stretch>
+            <a:fillRect/>
+          </a:stretch>
+        </p:blipFill>
+        <p:spPr>
+          <a:xfrm>
+            <a:off x="4998085" y="84455"/>
+            <a:ext cx="7016750" cy="6858000"/>
+          </a:xfrm>
+          <a:prstGeom prst="rect">
+            <a:avLst/>
+          </a:prstGeom>
+        </p:spPr>
+      </p:pic>
+      <p:sp>
+        <p:nvSpPr>
+          <p:cNvPr id="5" name="文本框 4"/>
+          <p:cNvSpPr txBox="1"/>
+          <p:nvPr/>
+        </p:nvSpPr>
+        <p:spPr>
+          <a:xfrm>
+            <a:off x="213995" y="245110"/>
+            <a:ext cx="3020695" cy="645160"/>
+          </a:xfrm>
+          <a:prstGeom prst="rect">
+            <a:avLst/>
+          </a:prstGeom>
+          <a:noFill/>
+        </p:spPr>
+        <p:txBody>
+          <a:bodyPr wrap="square" rtlCol="0">
+            <a:spAutoFit/>
+          </a:bodyPr>
+          <a:p>
+            <a:r>
+              <a:rPr lang="en-US" altLang="zh-CN">
+                <a:latin typeface="Times New Roman" panose="02020603050405020304" charset="0"/>
+                <a:ea typeface="微软雅黑" panose="020B0503020204020204" charset="-122"/>
+                <a:cs typeface="Times New Roman" panose="02020603050405020304" charset="0"/>
+                <a:sym typeface="+mn-ea"/>
+              </a:rPr>
+              <a:t>qwen_openai_style_llm.py</a:t>
+            </a:r>
+            <a:endParaRPr lang="en-US" altLang="zh-CN">
+              <a:latin typeface="Times New Roman" panose="02020603050405020304" charset="0"/>
+              <a:ea typeface="微软雅黑" panose="020B0503020204020204" charset="-122"/>
+              <a:cs typeface="Times New Roman" panose="02020603050405020304" charset="0"/>
+              <a:sym typeface="+mn-ea"/>
+            </a:endParaRPr>
+          </a:p>
+          <a:p>
+            <a:endParaRPr lang="zh-CN" altLang="en-US">
+              <a:latin typeface="Times New Roman" panose="02020603050405020304" charset="0"/>
+              <a:cs typeface="Times New Roman" panose="02020603050405020304" charset="0"/>
+            </a:endParaRPr>
+          </a:p>
+        </p:txBody>
+      </p:sp>
     </p:spTree>
     <p:custDataLst>
       <p:tags r:id="rId2"/>
@@ -5834,22 +5967,6 @@
 
 <file path=ppt/tags/tag64.xml><?xml version="1.0" encoding="utf-8"?>
 <p:tagLst xmlns:p="http://schemas.openxmlformats.org/presentationml/2006/main">
-  <p:tag name="KSO_WM_BEAUTIFY_FLAG" val="#wm#"/>
-  <p:tag name="KSO_WM_TEMPLATE_CATEGORY" val="custom"/>
-  <p:tag name="KSO_WM_TEMPLATE_INDEX" val="20205081"/>
-</p:tagLst>
-</file>
-
-<file path=ppt/tags/tag65.xml><?xml version="1.0" encoding="utf-8"?>
-<p:tagLst xmlns:p="http://schemas.openxmlformats.org/presentationml/2006/main">
-  <p:tag name="KSO_WM_BEAUTIFY_FLAG" val="#wm#"/>
-  <p:tag name="KSO_WM_TEMPLATE_CATEGORY" val="custom"/>
-  <p:tag name="KSO_WM_TEMPLATE_INDEX" val="20205081"/>
-</p:tagLst>
-</file>
-
-<file path=ppt/tags/tag66.xml><?xml version="1.0" encoding="utf-8"?>
-<p:tagLst xmlns:p="http://schemas.openxmlformats.org/presentationml/2006/main">
   <p:tag name="KSO_WM_SLIDE_ID" val="custom20205081_1"/>
   <p:tag name="KSO_WM_TEMPLATE_SUBCATEGORY" val="19"/>
   <p:tag name="KSO_WM_TEMPLATE_MASTER_TYPE" val="0"/>
@@ -5866,6 +5983,22 @@
   <p:tag name="KSO_WM_SLIDE_LAYOUT_CNT" val="1_1"/>
   <p:tag name="KSO_WM_UNIT_SHOW_EDIT_AREA_INDICATION" val="1"/>
   <p:tag name="KSO_WM_TEMPLATE_THUMBS_INDEX" val="1、4、7、12、13、14、15、16、17、18、20、24、25、28、33、36、40、43、44"/>
+</p:tagLst>
+</file>
+
+<file path=ppt/tags/tag65.xml><?xml version="1.0" encoding="utf-8"?>
+<p:tagLst xmlns:p="http://schemas.openxmlformats.org/presentationml/2006/main">
+  <p:tag name="KSO_WM_BEAUTIFY_FLAG" val="#wm#"/>
+  <p:tag name="KSO_WM_TEMPLATE_CATEGORY" val="custom"/>
+  <p:tag name="KSO_WM_TEMPLATE_INDEX" val="20205081"/>
+</p:tagLst>
+</file>
+
+<file path=ppt/tags/tag66.xml><?xml version="1.0" encoding="utf-8"?>
+<p:tagLst xmlns:p="http://schemas.openxmlformats.org/presentationml/2006/main">
+  <p:tag name="KSO_WM_BEAUTIFY_FLAG" val="#wm#"/>
+  <p:tag name="KSO_WM_TEMPLATE_CATEGORY" val="custom"/>
+  <p:tag name="KSO_WM_TEMPLATE_INDEX" val="20205081"/>
 </p:tagLst>
 </file>
 
